--- a/results/figures/logger.array/loger.arrays.labeled.pptx
+++ b/results/figures/logger.array/loger.arrays.labeled.pptx
@@ -7,6 +7,7 @@
   <p:sldIdLst>
     <p:sldId id="256" r:id="rId2"/>
     <p:sldId id="259" r:id="rId3"/>
+    <p:sldId id="260" r:id="rId4"/>
   </p:sldIdLst>
   <p:sldSz cx="12192000" cy="6858000"/>
   <p:notesSz cx="6858000" cy="9144000"/>
@@ -255,7 +256,7 @@
           <a:p>
             <a:fld id="{157A4368-9A9D-4C78-BCCC-9984E7E3E5A4}" type="datetimeFigureOut">
               <a:rPr lang="en-US" smtClean="0"/>
-              <a:t>9/22/2023</a:t>
+              <a:t>11/8/2023</a:t>
             </a:fld>
             <a:endParaRPr lang="en-US"/>
           </a:p>
@@ -425,7 +426,7 @@
           <a:p>
             <a:fld id="{157A4368-9A9D-4C78-BCCC-9984E7E3E5A4}" type="datetimeFigureOut">
               <a:rPr lang="en-US" smtClean="0"/>
-              <a:t>9/22/2023</a:t>
+              <a:t>11/8/2023</a:t>
             </a:fld>
             <a:endParaRPr lang="en-US"/>
           </a:p>
@@ -605,7 +606,7 @@
           <a:p>
             <a:fld id="{157A4368-9A9D-4C78-BCCC-9984E7E3E5A4}" type="datetimeFigureOut">
               <a:rPr lang="en-US" smtClean="0"/>
-              <a:t>9/22/2023</a:t>
+              <a:t>11/8/2023</a:t>
             </a:fld>
             <a:endParaRPr lang="en-US"/>
           </a:p>
@@ -775,7 +776,7 @@
           <a:p>
             <a:fld id="{157A4368-9A9D-4C78-BCCC-9984E7E3E5A4}" type="datetimeFigureOut">
               <a:rPr lang="en-US" smtClean="0"/>
-              <a:t>9/22/2023</a:t>
+              <a:t>11/8/2023</a:t>
             </a:fld>
             <a:endParaRPr lang="en-US"/>
           </a:p>
@@ -1021,7 +1022,7 @@
           <a:p>
             <a:fld id="{157A4368-9A9D-4C78-BCCC-9984E7E3E5A4}" type="datetimeFigureOut">
               <a:rPr lang="en-US" smtClean="0"/>
-              <a:t>9/22/2023</a:t>
+              <a:t>11/8/2023</a:t>
             </a:fld>
             <a:endParaRPr lang="en-US"/>
           </a:p>
@@ -1253,7 +1254,7 @@
           <a:p>
             <a:fld id="{157A4368-9A9D-4C78-BCCC-9984E7E3E5A4}" type="datetimeFigureOut">
               <a:rPr lang="en-US" smtClean="0"/>
-              <a:t>9/22/2023</a:t>
+              <a:t>11/8/2023</a:t>
             </a:fld>
             <a:endParaRPr lang="en-US"/>
           </a:p>
@@ -1620,7 +1621,7 @@
           <a:p>
             <a:fld id="{157A4368-9A9D-4C78-BCCC-9984E7E3E5A4}" type="datetimeFigureOut">
               <a:rPr lang="en-US" smtClean="0"/>
-              <a:t>9/22/2023</a:t>
+              <a:t>11/8/2023</a:t>
             </a:fld>
             <a:endParaRPr lang="en-US"/>
           </a:p>
@@ -1738,7 +1739,7 @@
           <a:p>
             <a:fld id="{157A4368-9A9D-4C78-BCCC-9984E7E3E5A4}" type="datetimeFigureOut">
               <a:rPr lang="en-US" smtClean="0"/>
-              <a:t>9/22/2023</a:t>
+              <a:t>11/8/2023</a:t>
             </a:fld>
             <a:endParaRPr lang="en-US"/>
           </a:p>
@@ -1833,7 +1834,7 @@
           <a:p>
             <a:fld id="{157A4368-9A9D-4C78-BCCC-9984E7E3E5A4}" type="datetimeFigureOut">
               <a:rPr lang="en-US" smtClean="0"/>
-              <a:t>9/22/2023</a:t>
+              <a:t>11/8/2023</a:t>
             </a:fld>
             <a:endParaRPr lang="en-US"/>
           </a:p>
@@ -2110,7 +2111,7 @@
           <a:p>
             <a:fld id="{157A4368-9A9D-4C78-BCCC-9984E7E3E5A4}" type="datetimeFigureOut">
               <a:rPr lang="en-US" smtClean="0"/>
-              <a:t>9/22/2023</a:t>
+              <a:t>11/8/2023</a:t>
             </a:fld>
             <a:endParaRPr lang="en-US"/>
           </a:p>
@@ -2363,7 +2364,7 @@
           <a:p>
             <a:fld id="{157A4368-9A9D-4C78-BCCC-9984E7E3E5A4}" type="datetimeFigureOut">
               <a:rPr lang="en-US" smtClean="0"/>
-              <a:t>9/22/2023</a:t>
+              <a:t>11/8/2023</a:t>
             </a:fld>
             <a:endParaRPr lang="en-US"/>
           </a:p>
@@ -2576,7 +2577,7 @@
           <a:p>
             <a:fld id="{157A4368-9A9D-4C78-BCCC-9984E7E3E5A4}" type="datetimeFigureOut">
               <a:rPr lang="en-US" smtClean="0"/>
-              <a:t>9/22/2023</a:t>
+              <a:t>11/8/2023</a:t>
             </a:fld>
             <a:endParaRPr lang="en-US"/>
           </a:p>
@@ -3161,14 +3162,7 @@
                 <a:latin typeface="Times New Roman" panose="02020603050405020304" pitchFamily="18" charset="0"/>
                 <a:cs typeface="Times New Roman" panose="02020603050405020304" pitchFamily="18" charset="0"/>
               </a:rPr>
-              <a:t>Dissolved oxygen </a:t>
-            </a:r>
-            <a:r>
-              <a:rPr lang="en-US" sz="1500" dirty="0" smtClean="0">
-                <a:latin typeface="Times New Roman" panose="02020603050405020304" pitchFamily="18" charset="0"/>
-                <a:cs typeface="Times New Roman" panose="02020603050405020304" pitchFamily="18" charset="0"/>
-              </a:rPr>
-              <a:t>mg/L </a:t>
+              <a:t>Dissolved oxygen mg/L </a:t>
             </a:r>
             <a:endParaRPr lang="en-US" sz="1500" dirty="0">
               <a:latin typeface="Times New Roman" panose="02020603050405020304" pitchFamily="18" charset="0"/>
@@ -3394,14 +3388,7 @@
                 <a:latin typeface="Times New Roman" panose="02020603050405020304" pitchFamily="18" charset="0"/>
                 <a:cs typeface="Times New Roman" panose="02020603050405020304" pitchFamily="18" charset="0"/>
               </a:rPr>
-              <a:t>Dissolved oxygen </a:t>
-            </a:r>
-            <a:r>
-              <a:rPr lang="en-US" sz="1500" dirty="0" smtClean="0">
-                <a:latin typeface="Times New Roman" panose="02020603050405020304" pitchFamily="18" charset="0"/>
-                <a:cs typeface="Times New Roman" panose="02020603050405020304" pitchFamily="18" charset="0"/>
-              </a:rPr>
-              <a:t>mg/L </a:t>
+              <a:t>Dissolved oxygen mg/L </a:t>
             </a:r>
             <a:endParaRPr lang="en-US" sz="1500" dirty="0">
               <a:latin typeface="Times New Roman" panose="02020603050405020304" pitchFamily="18" charset="0"/>
@@ -3427,6 +3414,167 @@
       </p:par>
     </p:tnLst>
   </p:timing>
+</p:sld>
+</file>
+
+<file path=ppt/slides/slide3.xml><?xml version="1.0" encoding="utf-8"?>
+<p:sld xmlns:a="http://schemas.openxmlformats.org/drawingml/2006/main" xmlns:r="http://schemas.openxmlformats.org/officeDocument/2006/relationships" xmlns:p="http://schemas.openxmlformats.org/presentationml/2006/main">
+  <p:cSld>
+    <p:spTree>
+      <p:nvGrpSpPr>
+        <p:cNvPr id="1" name=""/>
+        <p:cNvGrpSpPr/>
+        <p:nvPr/>
+      </p:nvGrpSpPr>
+      <p:grpSpPr>
+        <a:xfrm>
+          <a:off x="0" y="0"/>
+          <a:ext cx="0" cy="0"/>
+          <a:chOff x="0" y="0"/>
+          <a:chExt cx="0" cy="0"/>
+        </a:xfrm>
+      </p:grpSpPr>
+      <p:sp>
+        <p:nvSpPr>
+          <p:cNvPr id="2" name="Title 1"/>
+          <p:cNvSpPr>
+            <a:spLocks noGrp="1"/>
+          </p:cNvSpPr>
+          <p:nvPr>
+            <p:ph type="title"/>
+          </p:nvPr>
+        </p:nvSpPr>
+        <p:spPr/>
+        <p:txBody>
+          <a:bodyPr/>
+          <a:lstStyle/>
+          <a:p>
+            <a:endParaRPr lang="en-US"/>
+          </a:p>
+        </p:txBody>
+      </p:sp>
+      <p:pic>
+        <p:nvPicPr>
+          <p:cNvPr id="4" name="Content Placeholder 3"/>
+          <p:cNvPicPr>
+            <a:picLocks noGrp="1" noChangeAspect="1"/>
+          </p:cNvPicPr>
+          <p:nvPr>
+            <p:ph idx="1"/>
+          </p:nvPr>
+        </p:nvPicPr>
+        <p:blipFill>
+          <a:blip r:embed="rId2" cstate="print">
+            <a:extLst>
+              <a:ext uri="{28A0092B-C50C-407E-A947-70E740481C1C}">
+                <a14:useLocalDpi xmlns:a14="http://schemas.microsoft.com/office/drawing/2010/main" val="0"/>
+              </a:ext>
+            </a:extLst>
+          </a:blip>
+          <a:stretch>
+            <a:fillRect/>
+          </a:stretch>
+        </p:blipFill>
+        <p:spPr>
+          <a:xfrm>
+            <a:off x="2569028" y="1918417"/>
+            <a:ext cx="6743271" cy="4215882"/>
+          </a:xfrm>
+        </p:spPr>
+      </p:pic>
+      <p:sp>
+        <p:nvSpPr>
+          <p:cNvPr id="5" name="Rectangle 4"/>
+          <p:cNvSpPr/>
+          <p:nvPr/>
+        </p:nvSpPr>
+        <p:spPr>
+          <a:xfrm>
+            <a:off x="4044696" y="1988312"/>
+            <a:ext cx="687324" cy="3574288"/>
+          </a:xfrm>
+          <a:prstGeom prst="rect">
+            <a:avLst/>
+          </a:prstGeom>
+        </p:spPr>
+        <p:style>
+          <a:lnRef idx="2">
+            <a:schemeClr val="accent1">
+              <a:shade val="50000"/>
+            </a:schemeClr>
+          </a:lnRef>
+          <a:fillRef idx="1">
+            <a:schemeClr val="accent1"/>
+          </a:fillRef>
+          <a:effectRef idx="0">
+            <a:schemeClr val="accent1"/>
+          </a:effectRef>
+          <a:fontRef idx="minor">
+            <a:schemeClr val="lt1"/>
+          </a:fontRef>
+        </p:style>
+        <p:txBody>
+          <a:bodyPr rtlCol="0" anchor="ctr"/>
+          <a:lstStyle/>
+          <a:p>
+            <a:pPr algn="ctr"/>
+            <a:endParaRPr lang="en-US"/>
+          </a:p>
+        </p:txBody>
+      </p:sp>
+      <p:sp>
+        <p:nvSpPr>
+          <p:cNvPr id="6" name="Rectangle 5"/>
+          <p:cNvSpPr/>
+          <p:nvPr/>
+        </p:nvSpPr>
+        <p:spPr>
+          <a:xfrm>
+            <a:off x="6135116" y="1988312"/>
+            <a:ext cx="687324" cy="3574288"/>
+          </a:xfrm>
+          <a:prstGeom prst="rect">
+            <a:avLst/>
+          </a:prstGeom>
+          <a:solidFill>
+            <a:srgbClr val="EE9512"/>
+          </a:solidFill>
+        </p:spPr>
+        <p:style>
+          <a:lnRef idx="2">
+            <a:schemeClr val="accent1">
+              <a:shade val="50000"/>
+            </a:schemeClr>
+          </a:lnRef>
+          <a:fillRef idx="1">
+            <a:schemeClr val="accent1"/>
+          </a:fillRef>
+          <a:effectRef idx="0">
+            <a:schemeClr val="accent1"/>
+          </a:effectRef>
+          <a:fontRef idx="minor">
+            <a:schemeClr val="lt1"/>
+          </a:fontRef>
+        </p:style>
+        <p:txBody>
+          <a:bodyPr rtlCol="0" anchor="ctr"/>
+          <a:lstStyle/>
+          <a:p>
+            <a:pPr algn="ctr"/>
+            <a:endParaRPr lang="en-US"/>
+          </a:p>
+        </p:txBody>
+      </p:sp>
+    </p:spTree>
+    <p:extLst>
+      <p:ext uri="{BB962C8B-B14F-4D97-AF65-F5344CB8AC3E}">
+        <p14:creationId xmlns:p14="http://schemas.microsoft.com/office/powerpoint/2010/main" val="2094324759"/>
+      </p:ext>
+    </p:extLst>
+  </p:cSld>
+  <p:clrMapOvr>
+    <a:masterClrMapping/>
+  </p:clrMapOvr>
 </p:sld>
 </file>
 

--- a/results/figures/logger.array/loger.arrays.labeled.pptx
+++ b/results/figures/logger.array/loger.arrays.labeled.pptx
@@ -7,7 +7,7 @@
   <p:sldIdLst>
     <p:sldId id="256" r:id="rId2"/>
     <p:sldId id="259" r:id="rId3"/>
-    <p:sldId id="260" r:id="rId4"/>
+    <p:sldId id="261" r:id="rId4"/>
   </p:sldIdLst>
   <p:sldSz cx="12192000" cy="6858000"/>
   <p:notesSz cx="6858000" cy="9144000"/>
@@ -167,10 +167,9 @@
           </a:lstStyle>
           <a:p>
             <a:r>
-              <a:rPr lang="en-US" smtClean="0"/>
+              <a:rPr lang="en-US"/>
               <a:t>Click to edit Master title style</a:t>
             </a:r>
-            <a:endParaRPr lang="en-US"/>
           </a:p>
         </p:txBody>
       </p:sp>
@@ -232,10 +231,9 @@
           </a:lstStyle>
           <a:p>
             <a:r>
-              <a:rPr lang="en-US" smtClean="0"/>
+              <a:rPr lang="en-US"/>
               <a:t>Click to edit Master subtitle style</a:t>
             </a:r>
-            <a:endParaRPr lang="en-US"/>
           </a:p>
         </p:txBody>
       </p:sp>
@@ -256,7 +254,7 @@
           <a:p>
             <a:fld id="{157A4368-9A9D-4C78-BCCC-9984E7E3E5A4}" type="datetimeFigureOut">
               <a:rPr lang="en-US" smtClean="0"/>
-              <a:t>11/8/2023</a:t>
+              <a:t>6/24/2025</a:t>
             </a:fld>
             <a:endParaRPr lang="en-US"/>
           </a:p>
@@ -350,10 +348,9 @@
           <a:lstStyle/>
           <a:p>
             <a:r>
-              <a:rPr lang="en-US" smtClean="0"/>
+              <a:rPr lang="en-US"/>
               <a:t>Click to edit Master title style</a:t>
             </a:r>
-            <a:endParaRPr lang="en-US"/>
           </a:p>
         </p:txBody>
       </p:sp>
@@ -374,38 +371,37 @@
           <a:p>
             <a:pPr lvl="0"/>
             <a:r>
-              <a:rPr lang="en-US" smtClean="0"/>
+              <a:rPr lang="en-US"/>
               <a:t>Edit Master text styles</a:t>
             </a:r>
           </a:p>
           <a:p>
             <a:pPr lvl="1"/>
             <a:r>
-              <a:rPr lang="en-US" smtClean="0"/>
+              <a:rPr lang="en-US"/>
               <a:t>Second level</a:t>
             </a:r>
           </a:p>
           <a:p>
             <a:pPr lvl="2"/>
             <a:r>
-              <a:rPr lang="en-US" smtClean="0"/>
+              <a:rPr lang="en-US"/>
               <a:t>Third level</a:t>
             </a:r>
           </a:p>
           <a:p>
             <a:pPr lvl="3"/>
             <a:r>
-              <a:rPr lang="en-US" smtClean="0"/>
+              <a:rPr lang="en-US"/>
               <a:t>Fourth level</a:t>
             </a:r>
           </a:p>
           <a:p>
             <a:pPr lvl="4"/>
             <a:r>
-              <a:rPr lang="en-US" smtClean="0"/>
+              <a:rPr lang="en-US"/>
               <a:t>Fifth level</a:t>
             </a:r>
-            <a:endParaRPr lang="en-US"/>
           </a:p>
         </p:txBody>
       </p:sp>
@@ -426,7 +422,7 @@
           <a:p>
             <a:fld id="{157A4368-9A9D-4C78-BCCC-9984E7E3E5A4}" type="datetimeFigureOut">
               <a:rPr lang="en-US" smtClean="0"/>
-              <a:t>11/8/2023</a:t>
+              <a:t>6/24/2025</a:t>
             </a:fld>
             <a:endParaRPr lang="en-US"/>
           </a:p>
@@ -525,10 +521,9 @@
           <a:lstStyle/>
           <a:p>
             <a:r>
-              <a:rPr lang="en-US" smtClean="0"/>
+              <a:rPr lang="en-US"/>
               <a:t>Click to edit Master title style</a:t>
             </a:r>
-            <a:endParaRPr lang="en-US"/>
           </a:p>
         </p:txBody>
       </p:sp>
@@ -554,38 +549,37 @@
           <a:p>
             <a:pPr lvl="0"/>
             <a:r>
-              <a:rPr lang="en-US" smtClean="0"/>
+              <a:rPr lang="en-US"/>
               <a:t>Edit Master text styles</a:t>
             </a:r>
           </a:p>
           <a:p>
             <a:pPr lvl="1"/>
             <a:r>
-              <a:rPr lang="en-US" smtClean="0"/>
+              <a:rPr lang="en-US"/>
               <a:t>Second level</a:t>
             </a:r>
           </a:p>
           <a:p>
             <a:pPr lvl="2"/>
             <a:r>
-              <a:rPr lang="en-US" smtClean="0"/>
+              <a:rPr lang="en-US"/>
               <a:t>Third level</a:t>
             </a:r>
           </a:p>
           <a:p>
             <a:pPr lvl="3"/>
             <a:r>
-              <a:rPr lang="en-US" smtClean="0"/>
+              <a:rPr lang="en-US"/>
               <a:t>Fourth level</a:t>
             </a:r>
           </a:p>
           <a:p>
             <a:pPr lvl="4"/>
             <a:r>
-              <a:rPr lang="en-US" smtClean="0"/>
+              <a:rPr lang="en-US"/>
               <a:t>Fifth level</a:t>
             </a:r>
-            <a:endParaRPr lang="en-US"/>
           </a:p>
         </p:txBody>
       </p:sp>
@@ -606,7 +600,7 @@
           <a:p>
             <a:fld id="{157A4368-9A9D-4C78-BCCC-9984E7E3E5A4}" type="datetimeFigureOut">
               <a:rPr lang="en-US" smtClean="0"/>
-              <a:t>11/8/2023</a:t>
+              <a:t>6/24/2025</a:t>
             </a:fld>
             <a:endParaRPr lang="en-US"/>
           </a:p>
@@ -700,10 +694,9 @@
           <a:lstStyle/>
           <a:p>
             <a:r>
-              <a:rPr lang="en-US" smtClean="0"/>
+              <a:rPr lang="en-US"/>
               <a:t>Click to edit Master title style</a:t>
             </a:r>
-            <a:endParaRPr lang="en-US"/>
           </a:p>
         </p:txBody>
       </p:sp>
@@ -724,38 +717,37 @@
           <a:p>
             <a:pPr lvl="0"/>
             <a:r>
-              <a:rPr lang="en-US" smtClean="0"/>
+              <a:rPr lang="en-US"/>
               <a:t>Edit Master text styles</a:t>
             </a:r>
           </a:p>
           <a:p>
             <a:pPr lvl="1"/>
             <a:r>
-              <a:rPr lang="en-US" smtClean="0"/>
+              <a:rPr lang="en-US"/>
               <a:t>Second level</a:t>
             </a:r>
           </a:p>
           <a:p>
             <a:pPr lvl="2"/>
             <a:r>
-              <a:rPr lang="en-US" smtClean="0"/>
+              <a:rPr lang="en-US"/>
               <a:t>Third level</a:t>
             </a:r>
           </a:p>
           <a:p>
             <a:pPr lvl="3"/>
             <a:r>
-              <a:rPr lang="en-US" smtClean="0"/>
+              <a:rPr lang="en-US"/>
               <a:t>Fourth level</a:t>
             </a:r>
           </a:p>
           <a:p>
             <a:pPr lvl="4"/>
             <a:r>
-              <a:rPr lang="en-US" smtClean="0"/>
+              <a:rPr lang="en-US"/>
               <a:t>Fifth level</a:t>
             </a:r>
-            <a:endParaRPr lang="en-US"/>
           </a:p>
         </p:txBody>
       </p:sp>
@@ -776,7 +768,7 @@
           <a:p>
             <a:fld id="{157A4368-9A9D-4C78-BCCC-9984E7E3E5A4}" type="datetimeFigureOut">
               <a:rPr lang="en-US" smtClean="0"/>
-              <a:t>11/8/2023</a:t>
+              <a:t>6/24/2025</a:t>
             </a:fld>
             <a:endParaRPr lang="en-US"/>
           </a:p>
@@ -879,10 +871,9 @@
           </a:lstStyle>
           <a:p>
             <a:r>
-              <a:rPr lang="en-US" smtClean="0"/>
+              <a:rPr lang="en-US"/>
               <a:t>Click to edit Master title style</a:t>
             </a:r>
-            <a:endParaRPr lang="en-US"/>
           </a:p>
         </p:txBody>
       </p:sp>
@@ -999,7 +990,7 @@
           <a:p>
             <a:pPr lvl="0"/>
             <a:r>
-              <a:rPr lang="en-US" smtClean="0"/>
+              <a:rPr lang="en-US"/>
               <a:t>Edit Master text styles</a:t>
             </a:r>
           </a:p>
@@ -1022,7 +1013,7 @@
           <a:p>
             <a:fld id="{157A4368-9A9D-4C78-BCCC-9984E7E3E5A4}" type="datetimeFigureOut">
               <a:rPr lang="en-US" smtClean="0"/>
-              <a:t>11/8/2023</a:t>
+              <a:t>6/24/2025</a:t>
             </a:fld>
             <a:endParaRPr lang="en-US"/>
           </a:p>
@@ -1116,10 +1107,9 @@
           <a:lstStyle/>
           <a:p>
             <a:r>
-              <a:rPr lang="en-US" smtClean="0"/>
+              <a:rPr lang="en-US"/>
               <a:t>Click to edit Master title style</a:t>
             </a:r>
-            <a:endParaRPr lang="en-US"/>
           </a:p>
         </p:txBody>
       </p:sp>
@@ -1145,38 +1135,37 @@
           <a:p>
             <a:pPr lvl="0"/>
             <a:r>
-              <a:rPr lang="en-US" smtClean="0"/>
+              <a:rPr lang="en-US"/>
               <a:t>Edit Master text styles</a:t>
             </a:r>
           </a:p>
           <a:p>
             <a:pPr lvl="1"/>
             <a:r>
-              <a:rPr lang="en-US" smtClean="0"/>
+              <a:rPr lang="en-US"/>
               <a:t>Second level</a:t>
             </a:r>
           </a:p>
           <a:p>
             <a:pPr lvl="2"/>
             <a:r>
-              <a:rPr lang="en-US" smtClean="0"/>
+              <a:rPr lang="en-US"/>
               <a:t>Third level</a:t>
             </a:r>
           </a:p>
           <a:p>
             <a:pPr lvl="3"/>
             <a:r>
-              <a:rPr lang="en-US" smtClean="0"/>
+              <a:rPr lang="en-US"/>
               <a:t>Fourth level</a:t>
             </a:r>
           </a:p>
           <a:p>
             <a:pPr lvl="4"/>
             <a:r>
-              <a:rPr lang="en-US" smtClean="0"/>
+              <a:rPr lang="en-US"/>
               <a:t>Fifth level</a:t>
             </a:r>
-            <a:endParaRPr lang="en-US"/>
           </a:p>
         </p:txBody>
       </p:sp>
@@ -1202,38 +1191,37 @@
           <a:p>
             <a:pPr lvl="0"/>
             <a:r>
-              <a:rPr lang="en-US" smtClean="0"/>
+              <a:rPr lang="en-US"/>
               <a:t>Edit Master text styles</a:t>
             </a:r>
           </a:p>
           <a:p>
             <a:pPr lvl="1"/>
             <a:r>
-              <a:rPr lang="en-US" smtClean="0"/>
+              <a:rPr lang="en-US"/>
               <a:t>Second level</a:t>
             </a:r>
           </a:p>
           <a:p>
             <a:pPr lvl="2"/>
             <a:r>
-              <a:rPr lang="en-US" smtClean="0"/>
+              <a:rPr lang="en-US"/>
               <a:t>Third level</a:t>
             </a:r>
           </a:p>
           <a:p>
             <a:pPr lvl="3"/>
             <a:r>
-              <a:rPr lang="en-US" smtClean="0"/>
+              <a:rPr lang="en-US"/>
               <a:t>Fourth level</a:t>
             </a:r>
           </a:p>
           <a:p>
             <a:pPr lvl="4"/>
             <a:r>
-              <a:rPr lang="en-US" smtClean="0"/>
+              <a:rPr lang="en-US"/>
               <a:t>Fifth level</a:t>
             </a:r>
-            <a:endParaRPr lang="en-US"/>
           </a:p>
         </p:txBody>
       </p:sp>
@@ -1254,7 +1242,7 @@
           <a:p>
             <a:fld id="{157A4368-9A9D-4C78-BCCC-9984E7E3E5A4}" type="datetimeFigureOut">
               <a:rPr lang="en-US" smtClean="0"/>
-              <a:t>11/8/2023</a:t>
+              <a:t>6/24/2025</a:t>
             </a:fld>
             <a:endParaRPr lang="en-US"/>
           </a:p>
@@ -1353,10 +1341,9 @@
           <a:lstStyle/>
           <a:p>
             <a:r>
-              <a:rPr lang="en-US" smtClean="0"/>
+              <a:rPr lang="en-US"/>
               <a:t>Click to edit Master title style</a:t>
             </a:r>
-            <a:endParaRPr lang="en-US"/>
           </a:p>
         </p:txBody>
       </p:sp>
@@ -1419,7 +1406,7 @@
           <a:p>
             <a:pPr lvl="0"/>
             <a:r>
-              <a:rPr lang="en-US" smtClean="0"/>
+              <a:rPr lang="en-US"/>
               <a:t>Edit Master text styles</a:t>
             </a:r>
           </a:p>
@@ -1447,38 +1434,37 @@
           <a:p>
             <a:pPr lvl="0"/>
             <a:r>
-              <a:rPr lang="en-US" smtClean="0"/>
+              <a:rPr lang="en-US"/>
               <a:t>Edit Master text styles</a:t>
             </a:r>
           </a:p>
           <a:p>
             <a:pPr lvl="1"/>
             <a:r>
-              <a:rPr lang="en-US" smtClean="0"/>
+              <a:rPr lang="en-US"/>
               <a:t>Second level</a:t>
             </a:r>
           </a:p>
           <a:p>
             <a:pPr lvl="2"/>
             <a:r>
-              <a:rPr lang="en-US" smtClean="0"/>
+              <a:rPr lang="en-US"/>
               <a:t>Third level</a:t>
             </a:r>
           </a:p>
           <a:p>
             <a:pPr lvl="3"/>
             <a:r>
-              <a:rPr lang="en-US" smtClean="0"/>
+              <a:rPr lang="en-US"/>
               <a:t>Fourth level</a:t>
             </a:r>
           </a:p>
           <a:p>
             <a:pPr lvl="4"/>
             <a:r>
-              <a:rPr lang="en-US" smtClean="0"/>
+              <a:rPr lang="en-US"/>
               <a:t>Fifth level</a:t>
             </a:r>
-            <a:endParaRPr lang="en-US"/>
           </a:p>
         </p:txBody>
       </p:sp>
@@ -1541,7 +1527,7 @@
           <a:p>
             <a:pPr lvl="0"/>
             <a:r>
-              <a:rPr lang="en-US" smtClean="0"/>
+              <a:rPr lang="en-US"/>
               <a:t>Edit Master text styles</a:t>
             </a:r>
           </a:p>
@@ -1569,38 +1555,37 @@
           <a:p>
             <a:pPr lvl="0"/>
             <a:r>
-              <a:rPr lang="en-US" smtClean="0"/>
+              <a:rPr lang="en-US"/>
               <a:t>Edit Master text styles</a:t>
             </a:r>
           </a:p>
           <a:p>
             <a:pPr lvl="1"/>
             <a:r>
-              <a:rPr lang="en-US" smtClean="0"/>
+              <a:rPr lang="en-US"/>
               <a:t>Second level</a:t>
             </a:r>
           </a:p>
           <a:p>
             <a:pPr lvl="2"/>
             <a:r>
-              <a:rPr lang="en-US" smtClean="0"/>
+              <a:rPr lang="en-US"/>
               <a:t>Third level</a:t>
             </a:r>
           </a:p>
           <a:p>
             <a:pPr lvl="3"/>
             <a:r>
-              <a:rPr lang="en-US" smtClean="0"/>
+              <a:rPr lang="en-US"/>
               <a:t>Fourth level</a:t>
             </a:r>
           </a:p>
           <a:p>
             <a:pPr lvl="4"/>
             <a:r>
-              <a:rPr lang="en-US" smtClean="0"/>
+              <a:rPr lang="en-US"/>
               <a:t>Fifth level</a:t>
             </a:r>
-            <a:endParaRPr lang="en-US"/>
           </a:p>
         </p:txBody>
       </p:sp>
@@ -1621,7 +1606,7 @@
           <a:p>
             <a:fld id="{157A4368-9A9D-4C78-BCCC-9984E7E3E5A4}" type="datetimeFigureOut">
               <a:rPr lang="en-US" smtClean="0"/>
-              <a:t>11/8/2023</a:t>
+              <a:t>6/24/2025</a:t>
             </a:fld>
             <a:endParaRPr lang="en-US"/>
           </a:p>
@@ -1715,10 +1700,9 @@
           <a:lstStyle/>
           <a:p>
             <a:r>
-              <a:rPr lang="en-US" smtClean="0"/>
+              <a:rPr lang="en-US"/>
               <a:t>Click to edit Master title style</a:t>
             </a:r>
-            <a:endParaRPr lang="en-US"/>
           </a:p>
         </p:txBody>
       </p:sp>
@@ -1739,7 +1723,7 @@
           <a:p>
             <a:fld id="{157A4368-9A9D-4C78-BCCC-9984E7E3E5A4}" type="datetimeFigureOut">
               <a:rPr lang="en-US" smtClean="0"/>
-              <a:t>11/8/2023</a:t>
+              <a:t>6/24/2025</a:t>
             </a:fld>
             <a:endParaRPr lang="en-US"/>
           </a:p>
@@ -1834,7 +1818,7 @@
           <a:p>
             <a:fld id="{157A4368-9A9D-4C78-BCCC-9984E7E3E5A4}" type="datetimeFigureOut">
               <a:rPr lang="en-US" smtClean="0"/>
-              <a:t>11/8/2023</a:t>
+              <a:t>6/24/2025</a:t>
             </a:fld>
             <a:endParaRPr lang="en-US"/>
           </a:p>
@@ -1937,10 +1921,9 @@
           </a:lstStyle>
           <a:p>
             <a:r>
-              <a:rPr lang="en-US" smtClean="0"/>
+              <a:rPr lang="en-US"/>
               <a:t>Click to edit Master title style</a:t>
             </a:r>
-            <a:endParaRPr lang="en-US"/>
           </a:p>
         </p:txBody>
       </p:sp>
@@ -1994,38 +1977,37 @@
           <a:p>
             <a:pPr lvl="0"/>
             <a:r>
-              <a:rPr lang="en-US" smtClean="0"/>
+              <a:rPr lang="en-US"/>
               <a:t>Edit Master text styles</a:t>
             </a:r>
           </a:p>
           <a:p>
             <a:pPr lvl="1"/>
             <a:r>
-              <a:rPr lang="en-US" smtClean="0"/>
+              <a:rPr lang="en-US"/>
               <a:t>Second level</a:t>
             </a:r>
           </a:p>
           <a:p>
             <a:pPr lvl="2"/>
             <a:r>
-              <a:rPr lang="en-US" smtClean="0"/>
+              <a:rPr lang="en-US"/>
               <a:t>Third level</a:t>
             </a:r>
           </a:p>
           <a:p>
             <a:pPr lvl="3"/>
             <a:r>
-              <a:rPr lang="en-US" smtClean="0"/>
+              <a:rPr lang="en-US"/>
               <a:t>Fourth level</a:t>
             </a:r>
           </a:p>
           <a:p>
             <a:pPr lvl="4"/>
             <a:r>
-              <a:rPr lang="en-US" smtClean="0"/>
+              <a:rPr lang="en-US"/>
               <a:t>Fifth level</a:t>
             </a:r>
-            <a:endParaRPr lang="en-US"/>
           </a:p>
         </p:txBody>
       </p:sp>
@@ -2088,7 +2070,7 @@
           <a:p>
             <a:pPr lvl="0"/>
             <a:r>
-              <a:rPr lang="en-US" smtClean="0"/>
+              <a:rPr lang="en-US"/>
               <a:t>Edit Master text styles</a:t>
             </a:r>
           </a:p>
@@ -2111,7 +2093,7 @@
           <a:p>
             <a:fld id="{157A4368-9A9D-4C78-BCCC-9984E7E3E5A4}" type="datetimeFigureOut">
               <a:rPr lang="en-US" smtClean="0"/>
-              <a:t>11/8/2023</a:t>
+              <a:t>6/24/2025</a:t>
             </a:fld>
             <a:endParaRPr lang="en-US"/>
           </a:p>
@@ -2214,10 +2196,9 @@
           </a:lstStyle>
           <a:p>
             <a:r>
-              <a:rPr lang="en-US" smtClean="0"/>
+              <a:rPr lang="en-US"/>
               <a:t>Click to edit Master title style</a:t>
             </a:r>
-            <a:endParaRPr lang="en-US"/>
           </a:p>
         </p:txBody>
       </p:sp>
@@ -2341,7 +2322,7 @@
           <a:p>
             <a:pPr lvl="0"/>
             <a:r>
-              <a:rPr lang="en-US" smtClean="0"/>
+              <a:rPr lang="en-US"/>
               <a:t>Edit Master text styles</a:t>
             </a:r>
           </a:p>
@@ -2364,7 +2345,7 @@
           <a:p>
             <a:fld id="{157A4368-9A9D-4C78-BCCC-9984E7E3E5A4}" type="datetimeFigureOut">
               <a:rPr lang="en-US" smtClean="0"/>
-              <a:t>11/8/2023</a:t>
+              <a:t>6/24/2025</a:t>
             </a:fld>
             <a:endParaRPr lang="en-US"/>
           </a:p>
@@ -2473,10 +2454,9 @@
           <a:lstStyle/>
           <a:p>
             <a:r>
-              <a:rPr lang="en-US" smtClean="0"/>
+              <a:rPr lang="en-US"/>
               <a:t>Click to edit Master title style</a:t>
             </a:r>
-            <a:endParaRPr lang="en-US"/>
           </a:p>
         </p:txBody>
       </p:sp>
@@ -2507,38 +2487,37 @@
           <a:p>
             <a:pPr lvl="0"/>
             <a:r>
-              <a:rPr lang="en-US" smtClean="0"/>
+              <a:rPr lang="en-US"/>
               <a:t>Edit Master text styles</a:t>
             </a:r>
           </a:p>
           <a:p>
             <a:pPr lvl="1"/>
             <a:r>
-              <a:rPr lang="en-US" smtClean="0"/>
+              <a:rPr lang="en-US"/>
               <a:t>Second level</a:t>
             </a:r>
           </a:p>
           <a:p>
             <a:pPr lvl="2"/>
             <a:r>
-              <a:rPr lang="en-US" smtClean="0"/>
+              <a:rPr lang="en-US"/>
               <a:t>Third level</a:t>
             </a:r>
           </a:p>
           <a:p>
             <a:pPr lvl="3"/>
             <a:r>
-              <a:rPr lang="en-US" smtClean="0"/>
+              <a:rPr lang="en-US"/>
               <a:t>Fourth level</a:t>
             </a:r>
           </a:p>
           <a:p>
             <a:pPr lvl="4"/>
             <a:r>
-              <a:rPr lang="en-US" smtClean="0"/>
+              <a:rPr lang="en-US"/>
               <a:t>Fifth level</a:t>
             </a:r>
-            <a:endParaRPr lang="en-US"/>
           </a:p>
         </p:txBody>
       </p:sp>
@@ -2577,7 +2556,7 @@
           <a:p>
             <a:fld id="{157A4368-9A9D-4C78-BCCC-9984E7E3E5A4}" type="datetimeFigureOut">
               <a:rPr lang="en-US" smtClean="0"/>
-              <a:t>11/8/2023</a:t>
+              <a:t>6/24/2025</a:t>
             </a:fld>
             <a:endParaRPr lang="en-US"/>
           </a:p>
@@ -3107,8 +3086,8 @@
         </p:nvSpPr>
         <p:spPr>
           <a:xfrm>
-            <a:off x="100960" y="2249585"/>
-            <a:ext cx="1395960" cy="323165"/>
+            <a:off x="43135" y="2240961"/>
+            <a:ext cx="1513025" cy="323165"/>
           </a:xfrm>
           <a:prstGeom prst="rect">
             <a:avLst/>
@@ -3116,22 +3095,18 @@
           <a:noFill/>
         </p:spPr>
         <p:txBody>
-          <a:bodyPr wrap="none" rtlCol="0">
+          <a:bodyPr wrap="square" rtlCol="0">
             <a:spAutoFit/>
           </a:bodyPr>
           <a:lstStyle/>
           <a:p>
             <a:r>
-              <a:rPr lang="en-US" sz="1500" dirty="0" smtClean="0">
+              <a:rPr lang="en-US" sz="1500" dirty="0">
                 <a:latin typeface="Times New Roman" panose="02020603050405020304" pitchFamily="18" charset="0"/>
                 <a:cs typeface="Times New Roman" panose="02020603050405020304" pitchFamily="18" charset="0"/>
               </a:rPr>
-              <a:t>Temperature ℃</a:t>
-            </a:r>
-            <a:endParaRPr lang="en-US" sz="1500" dirty="0">
-              <a:latin typeface="Times New Roman" panose="02020603050405020304" pitchFamily="18" charset="0"/>
-              <a:cs typeface="Times New Roman" panose="02020603050405020304" pitchFamily="18" charset="0"/>
-            </a:endParaRPr>
+              <a:t>Temperature (℃)</a:t>
+            </a:r>
           </a:p>
         </p:txBody>
       </p:sp>
@@ -3143,8 +3118,8 @@
         </p:nvSpPr>
         <p:spPr>
           <a:xfrm>
-            <a:off x="265860" y="4690230"/>
-            <a:ext cx="1320130" cy="553998"/>
+            <a:off x="396802" y="4819623"/>
+            <a:ext cx="1341369" cy="323165"/>
           </a:xfrm>
           <a:prstGeom prst="rect">
             <a:avLst/>
@@ -3158,15 +3133,39 @@
           <a:lstStyle/>
           <a:p>
             <a:r>
-              <a:rPr lang="en-US" sz="1500" dirty="0" smtClean="0">
+              <a:rPr lang="en-US" sz="1500" dirty="0">
                 <a:latin typeface="Times New Roman" panose="02020603050405020304" pitchFamily="18" charset="0"/>
                 <a:cs typeface="Times New Roman" panose="02020603050405020304" pitchFamily="18" charset="0"/>
               </a:rPr>
-              <a:t>Dissolved oxygen mg/L </a:t>
-            </a:r>
-            <a:endParaRPr lang="en-US" sz="1500" dirty="0">
+              <a:t>DO (</a:t>
+            </a:r>
+            <a:r>
+              <a:rPr lang="en-US" sz="1500" dirty="0">
+                <a:effectLst/>
+                <a:latin typeface="Times New Roman" panose="02020603050405020304" pitchFamily="18" charset="0"/>
+                <a:ea typeface="Calibri" panose="020F0502020204030204" pitchFamily="34" charset="0"/>
+              </a:rPr>
+              <a:t>mg L</a:t>
+            </a:r>
+            <a:r>
+              <a:rPr lang="en-US" sz="1500" baseline="30000" dirty="0">
+                <a:effectLst/>
+                <a:latin typeface="Times New Roman" panose="02020603050405020304" pitchFamily="18" charset="0"/>
+                <a:ea typeface="Calibri" panose="020F0502020204030204" pitchFamily="34" charset="0"/>
+              </a:rPr>
+              <a:t>-1</a:t>
+            </a:r>
+            <a:r>
+              <a:rPr lang="en-US" sz="1500" dirty="0">
+                <a:latin typeface="Times New Roman" panose="02020603050405020304" pitchFamily="18" charset="0"/>
+                <a:cs typeface="Times New Roman" panose="02020603050405020304" pitchFamily="18" charset="0"/>
+              </a:rPr>
+              <a:t>)</a:t>
+            </a:r>
+            <a:endParaRPr lang="en-US" sz="1500" baseline="30000" dirty="0">
+              <a:effectLst/>
               <a:latin typeface="Times New Roman" panose="02020603050405020304" pitchFamily="18" charset="0"/>
-              <a:cs typeface="Times New Roman" panose="02020603050405020304" pitchFamily="18" charset="0"/>
+              <a:ea typeface="Calibri" panose="020F0502020204030204" pitchFamily="34" charset="0"/>
             </a:endParaRPr>
           </a:p>
         </p:txBody>
@@ -3181,13 +3180,6 @@
   <p:clrMapOvr>
     <a:masterClrMapping/>
   </p:clrMapOvr>
-  <p:timing>
-    <p:tnLst>
-      <p:par>
-        <p:cTn id="1" dur="indefinite" restart="never" nodeType="tmRoot"/>
-      </p:par>
-    </p:tnLst>
-  </p:timing>
 </p:sld>
 </file>
 
@@ -3333,8 +3325,8 @@
         </p:nvSpPr>
         <p:spPr>
           <a:xfrm>
-            <a:off x="100960" y="2249585"/>
-            <a:ext cx="1395960" cy="323165"/>
+            <a:off x="40578" y="2240959"/>
+            <a:ext cx="1524200" cy="323165"/>
           </a:xfrm>
           <a:prstGeom prst="rect">
             <a:avLst/>
@@ -3348,16 +3340,12 @@
           <a:lstStyle/>
           <a:p>
             <a:r>
-              <a:rPr lang="en-US" sz="1500" dirty="0" smtClean="0">
+              <a:rPr lang="en-US" sz="1500" dirty="0">
                 <a:latin typeface="Times New Roman" panose="02020603050405020304" pitchFamily="18" charset="0"/>
                 <a:cs typeface="Times New Roman" panose="02020603050405020304" pitchFamily="18" charset="0"/>
               </a:rPr>
-              <a:t>Temperature ℃</a:t>
-            </a:r>
-            <a:endParaRPr lang="en-US" sz="1500" dirty="0">
-              <a:latin typeface="Times New Roman" panose="02020603050405020304" pitchFamily="18" charset="0"/>
-              <a:cs typeface="Times New Roman" panose="02020603050405020304" pitchFamily="18" charset="0"/>
-            </a:endParaRPr>
+              <a:t>Temperature (℃)</a:t>
+            </a:r>
           </a:p>
         </p:txBody>
       </p:sp>
@@ -3369,8 +3357,8 @@
         </p:nvSpPr>
         <p:spPr>
           <a:xfrm>
-            <a:off x="265860" y="4690230"/>
-            <a:ext cx="1320130" cy="553998"/>
+            <a:off x="396804" y="4819620"/>
+            <a:ext cx="1319842" cy="323165"/>
           </a:xfrm>
           <a:prstGeom prst="rect">
             <a:avLst/>
@@ -3384,15 +3372,39 @@
           <a:lstStyle/>
           <a:p>
             <a:r>
-              <a:rPr lang="en-US" sz="1500" dirty="0" smtClean="0">
+              <a:rPr lang="en-US" sz="1500" dirty="0">
                 <a:latin typeface="Times New Roman" panose="02020603050405020304" pitchFamily="18" charset="0"/>
                 <a:cs typeface="Times New Roman" panose="02020603050405020304" pitchFamily="18" charset="0"/>
               </a:rPr>
-              <a:t>Dissolved oxygen mg/L </a:t>
-            </a:r>
-            <a:endParaRPr lang="en-US" sz="1500" dirty="0">
+              <a:t>DO (</a:t>
+            </a:r>
+            <a:r>
+              <a:rPr lang="en-US" sz="1500" dirty="0">
+                <a:effectLst/>
+                <a:latin typeface="Times New Roman" panose="02020603050405020304" pitchFamily="18" charset="0"/>
+                <a:ea typeface="Calibri" panose="020F0502020204030204" pitchFamily="34" charset="0"/>
+              </a:rPr>
+              <a:t>mg L</a:t>
+            </a:r>
+            <a:r>
+              <a:rPr lang="en-US" sz="1500" baseline="30000" dirty="0">
+                <a:effectLst/>
+                <a:latin typeface="Times New Roman" panose="02020603050405020304" pitchFamily="18" charset="0"/>
+                <a:ea typeface="Calibri" panose="020F0502020204030204" pitchFamily="34" charset="0"/>
+              </a:rPr>
+              <a:t>-1</a:t>
+            </a:r>
+            <a:r>
+              <a:rPr lang="en-US" sz="1500" dirty="0">
+                <a:latin typeface="Times New Roman" panose="02020603050405020304" pitchFamily="18" charset="0"/>
+                <a:cs typeface="Times New Roman" panose="02020603050405020304" pitchFamily="18" charset="0"/>
+              </a:rPr>
+              <a:t>)</a:t>
+            </a:r>
+            <a:endParaRPr lang="en-US" sz="1500" baseline="30000" dirty="0">
+              <a:effectLst/>
               <a:latin typeface="Times New Roman" panose="02020603050405020304" pitchFamily="18" charset="0"/>
-              <a:cs typeface="Times New Roman" panose="02020603050405020304" pitchFamily="18" charset="0"/>
+              <a:ea typeface="Calibri" panose="020F0502020204030204" pitchFamily="34" charset="0"/>
             </a:endParaRPr>
           </a:p>
         </p:txBody>
@@ -3407,13 +3419,6 @@
   <p:clrMapOvr>
     <a:masterClrMapping/>
   </p:clrMapOvr>
-  <p:timing>
-    <p:tnLst>
-      <p:par>
-        <p:cTn id="1" dur="indefinite" restart="never" nodeType="tmRoot"/>
-      </p:par>
-    </p:tnLst>
-  </p:timing>
 </p:sld>
 </file>
 
@@ -3434,28 +3439,15 @@
           <a:chExt cx="0" cy="0"/>
         </a:xfrm>
       </p:grpSpPr>
-      <p:sp>
-        <p:nvSpPr>
-          <p:cNvPr id="2" name="Title 1"/>
-          <p:cNvSpPr>
-            <a:spLocks noGrp="1"/>
-          </p:cNvSpPr>
-          <p:nvPr>
-            <p:ph type="title"/>
-          </p:nvPr>
-        </p:nvSpPr>
-        <p:spPr/>
-        <p:txBody>
-          <a:bodyPr/>
-          <a:lstStyle/>
-          <a:p>
-            <a:endParaRPr lang="en-US"/>
-          </a:p>
-        </p:txBody>
-      </p:sp>
       <p:pic>
         <p:nvPicPr>
-          <p:cNvPr id="4" name="Content Placeholder 3"/>
+          <p:cNvPr id="5" name="Content Placeholder 4" descr="A graph of different colored lines&#10;&#10;AI-generated content may be incorrect.">
+            <a:extLst>
+              <a:ext uri="{FF2B5EF4-FFF2-40B4-BE49-F238E27FC236}">
+                <a16:creationId xmlns:a16="http://schemas.microsoft.com/office/drawing/2014/main" id="{D4A7C5AE-A890-D84D-E6F3-A69F9015808E}"/>
+              </a:ext>
+            </a:extLst>
+          </p:cNvPr>
           <p:cNvPicPr>
             <a:picLocks noGrp="1" noChangeAspect="1"/>
           </p:cNvPicPr>
@@ -3477,98 +3469,128 @@
         </p:blipFill>
         <p:spPr>
           <a:xfrm>
-            <a:off x="2569028" y="1918417"/>
-            <a:ext cx="6743271" cy="4215882"/>
+            <a:off x="3299087" y="1825625"/>
+            <a:ext cx="5593825" cy="4351338"/>
           </a:xfrm>
         </p:spPr>
       </p:pic>
       <p:sp>
         <p:nvSpPr>
-          <p:cNvPr id="5" name="Rectangle 4"/>
-          <p:cNvSpPr/>
+          <p:cNvPr id="6" name="Text Box 9">
+            <a:extLst>
+              <a:ext uri="{FF2B5EF4-FFF2-40B4-BE49-F238E27FC236}">
+                <a16:creationId xmlns:a16="http://schemas.microsoft.com/office/drawing/2014/main" id="{979E4264-031A-CE1D-F9EE-856FC2F277E7}"/>
+              </a:ext>
+            </a:extLst>
+          </p:cNvPr>
+          <p:cNvSpPr txBox="1"/>
           <p:nvPr/>
         </p:nvSpPr>
         <p:spPr>
           <a:xfrm>
-            <a:off x="4044696" y="1988312"/>
-            <a:ext cx="687324" cy="3574288"/>
+            <a:off x="4464399" y="1670503"/>
+            <a:ext cx="739140" cy="266700"/>
           </a:xfrm>
           <a:prstGeom prst="rect">
             <a:avLst/>
           </a:prstGeom>
+          <a:noFill/>
+          <a:ln w="6350">
+            <a:noFill/>
+          </a:ln>
         </p:spPr>
-        <p:style>
-          <a:lnRef idx="2">
-            <a:schemeClr val="accent1">
-              <a:shade val="50000"/>
-            </a:schemeClr>
-          </a:lnRef>
-          <a:fillRef idx="1">
-            <a:schemeClr val="accent1"/>
-          </a:fillRef>
-          <a:effectRef idx="0">
-            <a:schemeClr val="accent1"/>
-          </a:effectRef>
-          <a:fontRef idx="minor">
-            <a:schemeClr val="lt1"/>
-          </a:fontRef>
-        </p:style>
-        <p:txBody>
-          <a:bodyPr rtlCol="0" anchor="ctr"/>
-          <a:lstStyle/>
-          <a:p>
-            <a:pPr algn="ctr"/>
-            <a:endParaRPr lang="en-US"/>
-          </a:p>
-        </p:txBody>
-      </p:sp>
-      <p:sp>
-        <p:nvSpPr>
-          <p:cNvPr id="6" name="Rectangle 5"/>
-          <p:cNvSpPr/>
+        <p:txBody>
+          <a:bodyPr rot="0" spcFirstLastPara="0" vert="horz" wrap="square" lIns="91440" tIns="45720" rIns="91440" bIns="45720" numCol="1" spcCol="0" rtlCol="0" fromWordArt="0" anchor="t" anchorCtr="0" forceAA="0" compatLnSpc="1">
+            <a:prstTxWarp prst="textNoShape">
+              <a:avLst/>
+            </a:prstTxWarp>
+            <a:noAutofit/>
+          </a:bodyPr>
+          <a:lstStyle/>
+          <a:p>
+            <a:pPr marL="0" marR="0">
+              <a:lnSpc>
+                <a:spcPct val="107000"/>
+              </a:lnSpc>
+              <a:spcAft>
+                <a:spcPts val="800"/>
+              </a:spcAft>
+            </a:pPr>
+            <a:r>
+              <a:rPr lang="en-US" sz="1200" dirty="0">
+                <a:effectLst/>
+                <a:latin typeface="Times New Roman" panose="02020603050405020304" pitchFamily="18" charset="0"/>
+                <a:ea typeface="Calibri" panose="020F0502020204030204" pitchFamily="34" charset="0"/>
+                <a:cs typeface="Times New Roman" panose="02020603050405020304" pitchFamily="18" charset="0"/>
+              </a:rPr>
+              <a:t>DO-min</a:t>
+            </a:r>
+          </a:p>
+        </p:txBody>
+      </p:sp>
+      <p:sp>
+        <p:nvSpPr>
+          <p:cNvPr id="7" name="Text Box 9">
+            <a:extLst>
+              <a:ext uri="{FF2B5EF4-FFF2-40B4-BE49-F238E27FC236}">
+                <a16:creationId xmlns:a16="http://schemas.microsoft.com/office/drawing/2014/main" id="{B2B44F53-EEEE-51B5-5E6C-3C1489DF4EBB}"/>
+              </a:ext>
+            </a:extLst>
+          </p:cNvPr>
+          <p:cNvSpPr txBox="1"/>
           <p:nvPr/>
         </p:nvSpPr>
         <p:spPr>
           <a:xfrm>
-            <a:off x="6135116" y="1988312"/>
-            <a:ext cx="687324" cy="3574288"/>
+            <a:off x="6216285" y="1673221"/>
+            <a:ext cx="957399" cy="296636"/>
           </a:xfrm>
           <a:prstGeom prst="rect">
             <a:avLst/>
           </a:prstGeom>
-          <a:solidFill>
-            <a:srgbClr val="EE9512"/>
-          </a:solidFill>
+          <a:noFill/>
+          <a:ln w="6350">
+            <a:noFill/>
+          </a:ln>
         </p:spPr>
-        <p:style>
-          <a:lnRef idx="2">
-            <a:schemeClr val="accent1">
-              <a:shade val="50000"/>
-            </a:schemeClr>
-          </a:lnRef>
-          <a:fillRef idx="1">
-            <a:schemeClr val="accent1"/>
-          </a:fillRef>
-          <a:effectRef idx="0">
-            <a:schemeClr val="accent1"/>
-          </a:effectRef>
-          <a:fontRef idx="minor">
-            <a:schemeClr val="lt1"/>
-          </a:fontRef>
-        </p:style>
-        <p:txBody>
-          <a:bodyPr rtlCol="0" anchor="ctr"/>
-          <a:lstStyle/>
-          <a:p>
-            <a:pPr algn="ctr"/>
-            <a:endParaRPr lang="en-US"/>
+        <p:txBody>
+          <a:bodyPr rot="0" spcFirstLastPara="0" vert="horz" wrap="square" lIns="91440" tIns="45720" rIns="91440" bIns="45720" numCol="1" spcCol="0" rtlCol="0" fromWordArt="0" anchor="t" anchorCtr="0" forceAA="0" compatLnSpc="1">
+            <a:prstTxWarp prst="textNoShape">
+              <a:avLst/>
+            </a:prstTxWarp>
+            <a:noAutofit/>
+          </a:bodyPr>
+          <a:lstStyle/>
+          <a:p>
+            <a:pPr marL="0" marR="0">
+              <a:lnSpc>
+                <a:spcPct val="107000"/>
+              </a:lnSpc>
+              <a:spcAft>
+                <a:spcPts val="800"/>
+              </a:spcAft>
+            </a:pPr>
+            <a:r>
+              <a:rPr lang="en-US" sz="1200" dirty="0">
+                <a:latin typeface="Times New Roman" panose="02020603050405020304" pitchFamily="18" charset="0"/>
+                <a:ea typeface="Calibri" panose="020F0502020204030204" pitchFamily="34" charset="0"/>
+                <a:cs typeface="Times New Roman" panose="02020603050405020304" pitchFamily="18" charset="0"/>
+              </a:rPr>
+              <a:t>Temp-max</a:t>
+            </a:r>
+            <a:endParaRPr lang="en-US" sz="1200" dirty="0">
+              <a:effectLst/>
+              <a:latin typeface="Calibri" panose="020F0502020204030204" pitchFamily="34" charset="0"/>
+              <a:ea typeface="Calibri" panose="020F0502020204030204" pitchFamily="34" charset="0"/>
+              <a:cs typeface="Times New Roman" panose="02020603050405020304" pitchFamily="18" charset="0"/>
+            </a:endParaRPr>
           </a:p>
         </p:txBody>
       </p:sp>
     </p:spTree>
     <p:extLst>
       <p:ext uri="{BB962C8B-B14F-4D97-AF65-F5344CB8AC3E}">
-        <p14:creationId xmlns:p14="http://schemas.microsoft.com/office/powerpoint/2010/main" val="2094324759"/>
+        <p14:creationId xmlns:p14="http://schemas.microsoft.com/office/powerpoint/2010/main" val="3169662401"/>
       </p:ext>
     </p:extLst>
   </p:cSld>
